--- a/teaching-pack/14-M10-deterioration-v-noise/M10-student.pptx
+++ b/teaching-pack/14-M10-deterioration-v-noise/M10-student.pptx
@@ -518,18 +518,13 @@
           <a:lstStyle/>
           <a:p>
             <a:r>
-              <a:t>OLI SAY PLACEHOLDER — CLOUD PASS PENDING.</a:t>
+              <a:t>OLI CANON SAY — Cloud hard-review PASS · revised M10.</a:t>
             </a:r>
           </a:p>
           <a:p/>
           <a:p>
             <a:r>
-              <a:t>Beat: title and meeting frame</a:t>
-            </a:r>
-          </a:p>
-          <a:p>
-            <a:r>
-              <a:t>Do not improvise or treat this scaffold as approved canon. Replace only from the Cloud-PASS M10 SAY file on follow-up.</a:t>
+              <a:t>TITLE — SAY: “Did it get worse? Today you will decide what a small change and its interval can honestly support.”</a:t>
             </a:r>
           </a:p>
         </p:txBody>
@@ -599,18 +594,13 @@
           <a:lstStyle/>
           <a:p>
             <a:r>
-              <a:t>OLI SAY PLACEHOLDER — CLOUD PASS PENDING.</a:t>
+              <a:t>OLI CANON SAY — Cloud hard-review PASS · revised M10.</a:t>
             </a:r>
           </a:p>
           <a:p/>
           <a:p>
             <a:r>
-              <a:t>Beat: paired design</a:t>
-            </a:r>
-          </a:p>
-          <a:p>
-            <a:r>
-              <a:t>Do not improvise or treat this scaffold as approved canon. Replace only from the Cloud-PASS M10 SAY file on follow-up.</a:t>
+              <a:t>TEACH — SAY: “For each matched location, calculate 2027 minus 2019. The observations for this analysis are the eight paired differences—not the 48 passes treated as independent changes.”</a:t>
             </a:r>
           </a:p>
         </p:txBody>
@@ -680,18 +670,13 @@
           <a:lstStyle/>
           <a:p>
             <a:r>
-              <a:t>OLI SAY PLACEHOLDER — CLOUD PASS PENDING.</a:t>
+              <a:t>OLI CANON SAY — Cloud hard-review PASS · revised M10.</a:t>
             </a:r>
           </a:p>
           <a:p/>
           <a:p>
             <a:r>
-              <a:t>Beat: measurement/process/sampling noise</a:t>
-            </a:r>
-          </a:p>
-          <a:p>
-            <a:r>
-              <a:t>Do not improvise or treat this scaffold as approved canon. Replace only from the Cloud-PASS M10 SAY file on follow-up.</a:t>
+              <a:t>TEACH — SAY: “Audit measurement repeatability, matched test process, and sampling uncertainty separately. A controlled process strengthens the comparison; it does not diagnose a damage mechanism.”</a:t>
             </a:r>
           </a:p>
         </p:txBody>
@@ -761,18 +746,13 @@
           <a:lstStyle/>
           <a:p>
             <a:r>
-              <a:t>OLI SAY PLACEHOLDER — CLOUD PASS PENDING.</a:t>
+              <a:t>OLI CANON SAY — Cloud hard-review PASS · revised M10.</a:t>
             </a:r>
           </a:p>
           <a:p/>
           <a:p>
             <a:r>
-              <a:t>Beat: test-control audit</a:t>
-            </a:r>
-          </a:p>
-          <a:p>
-            <a:r>
-              <a:t>Do not improvise or treat this scaffold as approved canon. Replace only from the Cloud-PASS M10 SAY file on follow-up.</a:t>
+              <a:t>LAB — SAY: “Verify the matched load, lane, speed, passes, and temperature handling. Name one source reduced by design and one uncertainty that remains.”</a:t>
             </a:r>
           </a:p>
         </p:txBody>
@@ -842,18 +822,13 @@
           <a:lstStyle/>
           <a:p>
             <a:r>
-              <a:t>OLI SAY PLACEHOLDER — CLOUD PASS PENDING.</a:t>
+              <a:t>OLI CANON SAY — Cloud hard-review PASS · revised M10.</a:t>
             </a:r>
           </a:p>
           <a:p/>
           <a:p>
             <a:r>
-              <a:t>Beat: paired 95% interval</a:t>
-            </a:r>
-          </a:p>
-          <a:p>
-            <a:r>
-              <a:t>Do not improvise or treat this scaffold as approved canon. Replace only from the Cloud-PASS M10 SAY file on follow-up.</a:t>
+              <a:t>LAB — SAY: “Build the 95% interval on the eight paired differences. Mark whether zero is inside. Commit one supported sentence before the reveal.”</a:t>
             </a:r>
           </a:p>
         </p:txBody>
@@ -923,18 +898,13 @@
           <a:lstStyle/>
           <a:p>
             <a:r>
-              <a:t>OLI SAY PLACEHOLDER — CLOUD PASS PENDING.</a:t>
+              <a:t>OLI CANON SAY — Cloud hard-review PASS · revised M10.</a:t>
             </a:r>
           </a:p>
           <a:p/>
           <a:p>
             <a:r>
-              <a:t>Beat: p-value and significance language</a:t>
-            </a:r>
-          </a:p>
-          <a:p>
-            <a:r>
-              <a:t>Do not improvise or treat this scaffold as approved canon. Replace only from the Cloud-PASS M10 SAY file on follow-up.</a:t>
+              <a:t>TEACH — SAY: “A p-value is not the probability that a claim is true. FOREMAN’s ‘96% chance’ line is the misconception you must reject. Statistically significant does not mean confirmed, and it does not mean large.”</a:t>
             </a:r>
           </a:p>
         </p:txBody>
@@ -1004,18 +974,13 @@
           <a:lstStyle/>
           <a:p>
             <a:r>
-              <a:t>OLI SAY PLACEHOLDER — CLOUD PASS PENDING.</a:t>
+              <a:t>OLI CANON SAY — Cloud hard-review PASS · revised M10.</a:t>
             </a:r>
           </a:p>
           <a:p/>
           <a:p>
             <a:r>
-              <a:t>Beat: 99% sensitivity check</a:t>
-            </a:r>
-          </a:p>
-          <a:p>
-            <a:r>
-              <a:t>Do not improvise or treat this scaffold as approved canon. Replace only from the Cloud-PASS M10 SAY file on follow-up.</a:t>
+              <a:t>LAB — SAY: “Keep the estimate, standard error, and degrees of freedom fixed. Use the 99% t multiplier. If zero enters, explain why the intervals are not contradictory: higher confidence requires a wider interval.”</a:t>
             </a:r>
           </a:p>
         </p:txBody>
@@ -1085,18 +1050,13 @@
           <a:lstStyle/>
           <a:p>
             <a:r>
-              <a:t>OLI SAY PLACEHOLDER — CLOUD PASS PENDING.</a:t>
+              <a:t>OLI CANON SAY — Cloud hard-review PASS · revised M10.</a:t>
             </a:r>
           </a:p>
           <a:p/>
           <a:p>
             <a:r>
-              <a:t>Beat: Note v2</a:t>
-            </a:r>
-          </a:p>
-          <a:p>
-            <a:r>
-              <a:t>Do not improvise or treat this scaffold as approved canon. Replace only from the Cloud-PASS M10 SAY file on follow-up.</a:t>
+              <a:t>NOTE — SAY: “Write Note version 2: claim, check, result. Include the mean change and an interval. Notebook line: p does not equal P of claim true; significant does not equal confirmed or large.”</a:t>
             </a:r>
           </a:p>
         </p:txBody>
@@ -1166,18 +1126,13 @@
           <a:lstStyle/>
           <a:p>
             <a:r>
-              <a:t>OLI SAY PLACEHOLDER — CLOUD PASS PENDING.</a:t>
+              <a:t>OLI CANON SAY — Cloud hard-review PASS · revised M10.</a:t>
             </a:r>
           </a:p>
           <a:p/>
           <a:p>
             <a:r>
-              <a:t>Beat: HW5 callback and close</a:t>
-            </a:r>
-          </a:p>
-          <a:p>
-            <a:r>
-              <a:t>Do not improvise or treat this scaffold as approved canon. Replace only from the Cloud-PASS M10 SAY file on follow-up.</a:t>
+              <a:t>CLOSE — SAY: “HW5 is the confidence interval on mean daily peak strain from the feed. HW3 callback: if duplicate timestamps were not removed, the sample appears larger than it is and the interval comes out too narrow. Say why in one sentence on the HW5 sheet. Eyes outside this project team will soon be on the Otter Bend health record; preserve the uncertainty now.”</a:t>
             </a:r>
           </a:p>
         </p:txBody>
@@ -1247,18 +1202,13 @@
           <a:lstStyle/>
           <a:p>
             <a:r>
-              <a:t>OLI SAY PLACEHOLDER — CLOUD PASS PENDING.</a:t>
+              <a:t>OLI CANON SAY — Cloud hard-review PASS · revised M10.</a:t>
             </a:r>
           </a:p>
           <a:p/>
           <a:p>
             <a:r>
-              <a:t>Beat: inbox: Diane, FOREMAN, and schedule pressure</a:t>
-            </a:r>
-          </a:p>
-          <a:p>
-            <a:r>
-              <a:t>Do not improvise or treat this scaffold as approved canon. Replace only from the Cloud-PASS M10 SAY file on follow-up.</a:t>
+              <a:t>INBOX — Diane Halvorsen, PE: “Otter Bend deck—worse since 2019? Yes or no. County wants an answer.” FOREMAN: “Mean strain under test truck +6%. Deterioration confirmed. p = 0.04 → 96% chance the deck has deteriorated.” Wes Tanaka, EIT, side thread: “I’m looking at the coupon pairs again. Don’t hang the whole story on that one line.” Wes does not co-solve.</a:t>
             </a:r>
           </a:p>
         </p:txBody>
@@ -1328,18 +1278,13 @@
           <a:lstStyle/>
           <a:p>
             <a:r>
-              <a:t>OLI SAY PLACEHOLDER — CLOUD PASS PENDING.</a:t>
+              <a:t>OLI CANON SAY — Cloud hard-review PASS · revised M10.</a:t>
             </a:r>
           </a:p>
           <a:p/>
           <a:p>
             <a:r>
-              <a:t>Beat: student hunt</a:t>
-            </a:r>
-          </a:p>
-          <a:p>
-            <a:r>
-              <a:t>Do not improvise or treat this scaffold as approved canon. Replace only from the Cloud-PASS M10 SAY file on follow-up.</a:t>
+              <a:t>HUNT — SAY: “Open the coupon and 2019/2027 load-test files. Build the coupon interval, compute the eight paired differences, then compare the 95% and 99% intervals. What can you tell Diane without deleting the uncertainty?”</a:t>
             </a:r>
           </a:p>
         </p:txBody>
@@ -1409,18 +1354,13 @@
           <a:lstStyle/>
           <a:p>
             <a:r>
-              <a:t>OLI SAY PLACEHOLDER — CLOUD PASS PENDING.</a:t>
+              <a:t>OLI CANON SAY — Cloud hard-review PASS · revised M10.</a:t>
             </a:r>
           </a:p>
           <a:p/>
           <a:p>
             <a:r>
-              <a:t>Beat: teach transition</a:t>
-            </a:r>
-          </a:p>
-          <a:p>
-            <a:r>
-              <a:t>Do not improvise or treat this scaffold as approved canon. Replace only from the Cloud-PASS M10 SAY file on follow-up.</a:t>
+              <a:t>TEACH TRANSITION — SAY: “Before we test FOREMAN’s conclusion, separate the estimate, the uncertainty around it, and the engineering claim.”</a:t>
             </a:r>
           </a:p>
         </p:txBody>
@@ -1490,18 +1430,13 @@
           <a:lstStyle/>
           <a:p>
             <a:r>
-              <a:t>OLI SAY PLACEHOLDER — CLOUD PASS PENDING.</a:t>
+              <a:t>OLI CANON SAY — Cloud hard-review PASS · revised M10.</a:t>
             </a:r>
           </a:p>
           <a:p/>
           <a:p>
             <a:r>
-              <a:t>Beat: standard error</a:t>
-            </a:r>
-          </a:p>
-          <a:p>
-            <a:r>
-              <a:t>Do not improvise or treat this scaffold as approved canon. Replace only from the Cloud-PASS M10 SAY file on follow-up.</a:t>
+              <a:t>TEACH — SAY: “Standard error estimates how much a sample mean would vary from sample to sample. It is not the spread of the individual readings.”</a:t>
             </a:r>
           </a:p>
         </p:txBody>
@@ -1571,18 +1506,13 @@
           <a:lstStyle/>
           <a:p>
             <a:r>
-              <a:t>OLI SAY PLACEHOLDER — CLOUD PASS PENDING.</a:t>
+              <a:t>OLI CANON SAY — Cloud hard-review PASS · revised M10.</a:t>
             </a:r>
           </a:p>
           <a:p/>
           <a:p>
             <a:r>
-              <a:t>Beat: t multiplier</a:t>
-            </a:r>
-          </a:p>
-          <a:p>
-            <a:r>
-              <a:t>Do not improvise or treat this scaffold as approved canon. Replace only from the Cloud-PASS M10 SAY file on follow-up.</a:t>
+              <a:t>TEACH — SAY: “For a small sample, the t multiplier reflects both confidence level and degrees of freedom. A higher confidence level requires a larger multiplier and a wider interval.”</a:t>
             </a:r>
           </a:p>
         </p:txBody>
@@ -1652,18 +1582,13 @@
           <a:lstStyle/>
           <a:p>
             <a:r>
-              <a:t>OLI SAY PLACEHOLDER — CLOUD PASS PENDING.</a:t>
+              <a:t>OLI CANON SAY — Cloud hard-review PASS · revised M10.</a:t>
             </a:r>
           </a:p>
           <a:p/>
           <a:p>
             <a:r>
-              <a:t>Beat: confidence level</a:t>
-            </a:r>
-          </a:p>
-          <a:p>
-            <a:r>
-              <a:t>Do not improvise or treat this scaffold as approved canon. Replace only from the Cloud-PASS M10 SAY file on follow-up.</a:t>
+              <a:t>TEACH — SAY: “Confidence describes the long-run performance of the interval-building method. It is not the probability that FOREMAN’s claim is true.”</a:t>
             </a:r>
           </a:p>
         </p:txBody>
@@ -1733,18 +1658,13 @@
           <a:lstStyle/>
           <a:p>
             <a:r>
-              <a:t>OLI SAY PLACEHOLDER — CLOUD PASS PENDING.</a:t>
+              <a:t>OLI CANON SAY — Cloud hard-review PASS · revised M10.</a:t>
             </a:r>
           </a:p>
           <a:p/>
           <a:p>
             <a:r>
-              <a:t>Beat: coupon warm-up</a:t>
-            </a:r>
-          </a:p>
-          <a:p>
-            <a:r>
-              <a:t>Do not improvise or treat this scaffold as approved canon. Replace only from the Cloud-PASS M10 SAY file on follow-up.</a:t>
+              <a:t>LAB — SAY: “Open coupons.csv. Build the interval for the coupon mean using the t-table. Show degrees of freedom and the critical t.”</a:t>
             </a:r>
           </a:p>
         </p:txBody>
@@ -1814,18 +1734,13 @@
           <a:lstStyle/>
           <a:p>
             <a:r>
-              <a:t>OLI SAY PLACEHOLDER — CLOUD PASS PENDING.</a:t>
+              <a:t>OLI CANON SAY — Cloud hard-review PASS · revised M10.</a:t>
             </a:r>
           </a:p>
           <a:p/>
           <a:p>
             <a:r>
-              <a:t>Beat: signal/noise transition</a:t>
-            </a:r>
-          </a:p>
-          <a:p>
-            <a:r>
-              <a:t>Do not improvise or treat this scaffold as approved canon. Replace only from the Cloud-PASS M10 SAY file on follow-up.</a:t>
+              <a:t>LAB TRANSITION — SAY: “Now move from interval mechanics to the Otter Bend question. Pair the same locations before summarizing.”</a:t>
             </a:r>
           </a:p>
         </p:txBody>
